--- a/gallery/renders/markdown_test_complex.pptx
+++ b/gallery/renders/markdown_test_complex.pptx
@@ -35,7 +35,7 @@
         <p:spPr>
           <a:xfrm>
             <a:off x="910336" y="2092147"/>
-            <a:ext cx="11184128" cy="4096512"/>
+            <a:ext cx="11184128" cy="3901440"/>
           </a:xfrm>
           <a:prstGeom prst="rect">
             <a:avLst/>
@@ -249,7 +249,7 @@
         <p:spPr>
           <a:xfrm>
             <a:off x="910336" y="687628"/>
-            <a:ext cx="11184128" cy="1141171"/>
+            <a:ext cx="11184128" cy="609599"/>
           </a:xfrm>
           <a:prstGeom prst="rect">
             <a:avLst/>

--- a/gallery/renders/markdown_test_complex.pptx
+++ b/gallery/renders/markdown_test_complex.pptx
@@ -35,7 +35,7 @@
         <p:spPr>
           <a:xfrm>
             <a:off x="910336" y="2092147"/>
-            <a:ext cx="11184128" cy="3901440"/>
+            <a:ext cx="11184128" cy="4089400"/>
           </a:xfrm>
           <a:prstGeom prst="rect">
             <a:avLst/>
@@ -50,55 +50,55 @@
               <a:buNone/>
             </a:pPr>
             <a:r>
-              <a:rPr lang="en-US" sz="1600">
+              <a:rPr lang="en-US" sz="2000">
                 <a:latin typeface="Arial"/>
               </a:rPr>
               <a:t>Here is a paragraph with </a:t>
             </a:r>
             <a:r>
-              <a:rPr lang="en-US" sz="1600" b="1">
+              <a:rPr lang="en-US" sz="2000" b="1">
                 <a:latin typeface="Arial"/>
               </a:rPr>
               <a:t>bold</a:t>
             </a:r>
             <a:r>
-              <a:rPr lang="en-US" sz="1600">
+              <a:rPr lang="en-US" sz="2000">
                 <a:latin typeface="Arial"/>
               </a:rPr>
               <a:t>, </a:t>
             </a:r>
             <a:r>
-              <a:rPr lang="en-US" sz="1600" i="1">
+              <a:rPr lang="en-US" sz="2000" i="1">
                 <a:latin typeface="Arial"/>
               </a:rPr>
               <a:t>italic</a:t>
             </a:r>
             <a:r>
-              <a:rPr lang="en-US" sz="1600">
+              <a:rPr lang="en-US" sz="2000">
                 <a:latin typeface="Arial"/>
               </a:rPr>
               <a:t>, and </a:t>
             </a:r>
             <a:r>
-              <a:rPr lang="en-US" sz="1600" strike="sngStrike">
+              <a:rPr lang="en-US" sz="2000" strike="sngStrike">
                 <a:latin typeface="Arial"/>
               </a:rPr>
               <a:t>strikethrough</a:t>
             </a:r>
             <a:r>
-              <a:rPr lang="en-US" sz="1600">
+              <a:rPr lang="en-US" sz="2000">
                 <a:latin typeface="Arial"/>
               </a:rPr>
               <a:t> text. You can also write </a:t>
             </a:r>
             <a:r>
-              <a:rPr lang="en-US" sz="1600">
+              <a:rPr lang="en-US" sz="2000">
                 <a:latin typeface="Courier New"/>
               </a:rPr>
               <a:t>inline code</a:t>
             </a:r>
             <a:r>
-              <a:rPr lang="en-US" sz="1600">
+              <a:rPr lang="en-US" sz="2000">
                 <a:latin typeface="Arial"/>
               </a:rPr>
               <a:t>.</a:t>
@@ -109,20 +109,20 @@
               <a:buNone/>
             </a:pPr>
             <a:r>
-              <a:rPr lang="en-US" sz="1600">
+              <a:rPr lang="en-US" sz="2000">
                 <a:latin typeface="Arial"/>
               </a:rPr>
               <a:t>This is a blockquote.</a:t>
             </a:r>
             <a:r>
-              <a:rPr lang="en-US" sz="1600">
+              <a:rPr lang="en-US" sz="2000">
                 <a:latin typeface="Arial"/>
               </a:rPr>
               <a:t>
 </a:t>
             </a:r>
             <a:r>
-              <a:rPr lang="en-US" sz="1600">
+              <a:rPr lang="en-US" sz="2000">
                 <a:latin typeface="Arial"/>
               </a:rPr>
               <a:t>It can span multiple lines.</a:t>
@@ -133,7 +133,7 @@
               <a:buNone/>
             </a:pPr>
             <a:r>
-              <a:rPr lang="en-US" sz="1600">
+              <a:rPr lang="en-US" sz="2000">
                 <a:latin typeface="Arial"/>
               </a:rPr>
               <a:t>Here is an unordered list:</a:t>
@@ -145,7 +145,7 @@
               <a:buChar char="•"/>
             </a:pPr>
             <a:r>
-              <a:rPr lang="en-US" sz="1600">
+              <a:rPr lang="en-US" sz="2000">
                 <a:latin typeface="Arial"/>
               </a:rPr>
               <a:t>Item 1</a:t>
@@ -157,7 +157,7 @@
               <a:buChar char="•"/>
             </a:pPr>
             <a:r>
-              <a:rPr lang="en-US" sz="1600">
+              <a:rPr lang="en-US" sz="2000">
                 <a:latin typeface="Arial"/>
               </a:rPr>
               <a:t>Item 2 with a nested code block:</a:t>
@@ -169,14 +169,14 @@
               <a:buChar char="•"/>
             </a:pPr>
             <a:r>
-              <a:rPr lang="en-US" sz="1600">
+              <a:rPr lang="en-US" sz="2000">
                 <a:latin typeface="Courier New"/>
               </a:rPr>
               <a:t>let x = 10;
 </a:t>
             </a:r>
             <a:r>
-              <a:rPr lang="en-US" sz="1600">
+              <a:rPr lang="en-US" sz="2000">
                 <a:latin typeface="Courier New"/>
               </a:rPr>
               <a:t>let y = 20;</a:t>
@@ -188,7 +188,7 @@
               <a:buChar char="•"/>
             </a:pPr>
             <a:r>
-              <a:rPr lang="en-US" sz="1600">
+              <a:rPr lang="en-US" sz="2000">
                 <a:latin typeface="Arial"/>
               </a:rPr>
               <a:t>Item 3</a:t>
@@ -199,7 +199,7 @@
               <a:buNone/>
             </a:pPr>
             <a:r>
-              <a:rPr lang="en-US" sz="1600">
+              <a:rPr lang="en-US" sz="2000">
                 <a:latin typeface="Arial"/>
               </a:rPr>
               <a:t>And an ordered list:</a:t>
@@ -210,7 +210,7 @@
               <a:buAutoNum type="arabicPeriod"/>
             </a:pPr>
             <a:r>
-              <a:rPr lang="en-US" sz="1600">
+              <a:rPr lang="en-US" sz="2000">
                 <a:latin typeface="Arial"/>
               </a:rPr>
               <a:t>First step</a:t>
@@ -221,7 +221,7 @@
               <a:buAutoNum type="arabicPeriod"/>
             </a:pPr>
             <a:r>
-              <a:rPr lang="en-US" sz="1600">
+              <a:rPr lang="en-US" sz="2000">
                 <a:latin typeface="Arial"/>
               </a:rPr>
               <a:t>Second step</a:t>
@@ -232,7 +232,7 @@
               <a:buNone/>
             </a:pPr>
             <a:r>
-              <a:rPr lang="en-US" sz="1600">
+              <a:rPr lang="en-US" sz="2000">
                 <a:latin typeface="Arial"/>
               </a:rPr>
               <a:t>End of test.</a:t>
